--- a/skills/property-mysoku-generator/assets/template_land.pptx
+++ b/skills/property-mysoku-generator/assets/template_land.pptx
@@ -1294,7 +1294,7 @@
               <a:buNone/>
             </a:pPr>
             <a:r>
-              <a:rPr lang="ja-JP" altLang="en-US" sz="700" b="1" dirty="0">
+              <a:rPr lang="ja-JP" altLang="en-US" sz="650" b="1" dirty="0">
                 <a:latin typeface="HGS明朝E" panose="02020800000000000000" charset="-128"/>
                 <a:ea typeface="HGS明朝E" panose="02020800000000000000" charset="-128"/>
                 <a:cs typeface="HGS明朝E" panose="02020800000000000000" charset="-128"/>
@@ -1302,7 +1302,7 @@
               <a:t>東京都知事免許</a:t>
             </a:r>
             <a:r>
-              <a:rPr lang="en-US" altLang="ja-JP" sz="700" b="1" dirty="0">
+              <a:rPr lang="en-US" altLang="ja-JP" sz="650" b="1" dirty="0">
                 <a:latin typeface="HGS明朝E" panose="02020800000000000000" charset="-128"/>
                 <a:ea typeface="HGS明朝E" panose="02020800000000000000" charset="-128"/>
                 <a:cs typeface="HGS明朝E" panose="02020800000000000000" charset="-128"/>
@@ -1310,7 +1310,7 @@
               <a:t>(4)</a:t>
             </a:r>
             <a:r>
-              <a:rPr lang="ja-JP" altLang="en-US" sz="700" b="1" dirty="0">
+              <a:rPr lang="ja-JP" altLang="en-US" sz="650" b="1" dirty="0">
                 <a:latin typeface="HGS明朝E" panose="02020800000000000000" charset="-128"/>
                 <a:ea typeface="HGS明朝E" panose="02020800000000000000" charset="-128"/>
                 <a:cs typeface="HGS明朝E" panose="02020800000000000000" charset="-128"/>
@@ -1318,7 +1318,7 @@
               <a:t>第</a:t>
             </a:r>
             <a:r>
-              <a:rPr lang="en-US" altLang="ja-JP" sz="700" b="1" dirty="0">
+              <a:rPr lang="en-US" altLang="ja-JP" sz="650" b="1" dirty="0">
                 <a:latin typeface="HGS明朝E" panose="02020800000000000000" charset="-128"/>
                 <a:ea typeface="HGS明朝E" panose="02020800000000000000" charset="-128"/>
                 <a:cs typeface="HGS明朝E" panose="02020800000000000000" charset="-128"/>
@@ -1326,7 +1326,7 @@
               <a:t>87972</a:t>
             </a:r>
             <a:r>
-              <a:rPr lang="ja-JP" altLang="en-US" sz="700" b="1" dirty="0">
+              <a:rPr lang="ja-JP" altLang="en-US" sz="650" b="1" dirty="0">
                 <a:latin typeface="HGS明朝E" panose="02020800000000000000" charset="-128"/>
                 <a:ea typeface="HGS明朝E" panose="02020800000000000000" charset="-128"/>
                 <a:cs typeface="HGS明朝E" panose="02020800000000000000" charset="-128"/>
@@ -1334,7 +1334,7 @@
               <a:t>号</a:t>
             </a:r>
             <a:r>
-              <a:rPr lang="en-US" altLang="ja-JP" sz="700" b="1" dirty="0">
+              <a:rPr lang="en-US" altLang="ja-JP" sz="650" b="1" dirty="0">
                 <a:latin typeface="HGS明朝E" panose="02020800000000000000" charset="-128"/>
                 <a:ea typeface="HGS明朝E" panose="02020800000000000000" charset="-128"/>
                 <a:cs typeface="HGS明朝E" panose="02020800000000000000" charset="-128"/>
@@ -1342,7 +1342,7 @@
               <a:t>(</a:t>
             </a:r>
             <a:r>
-              <a:rPr lang="ja-JP" altLang="en-US" sz="700" b="1" dirty="0">
+              <a:rPr lang="ja-JP" altLang="en-US" sz="650" b="1" dirty="0">
                 <a:latin typeface="HGS明朝E" panose="02020800000000000000" charset="-128"/>
                 <a:ea typeface="HGS明朝E" panose="02020800000000000000" charset="-128"/>
                 <a:cs typeface="HGS明朝E" panose="02020800000000000000" charset="-128"/>
@@ -1350,7 +1350,7 @@
               <a:t>公社</a:t>
             </a:r>
             <a:r>
-              <a:rPr lang="en-US" altLang="ja-JP" sz="700" b="1" dirty="0">
+              <a:rPr lang="en-US" altLang="ja-JP" sz="650" b="1" dirty="0">
                 <a:latin typeface="HGS明朝E" panose="02020800000000000000" charset="-128"/>
                 <a:ea typeface="HGS明朝E" panose="02020800000000000000" charset="-128"/>
                 <a:cs typeface="HGS明朝E" panose="02020800000000000000" charset="-128"/>
@@ -1358,7 +1358,7 @@
               <a:t>)</a:t>
             </a:r>
             <a:r>
-              <a:rPr lang="ja-JP" altLang="en-US" sz="700" b="1" dirty="0">
+              <a:rPr lang="ja-JP" altLang="en-US" sz="650" b="1" dirty="0">
                 <a:latin typeface="HGS明朝E" panose="02020800000000000000" charset="-128"/>
                 <a:ea typeface="HGS明朝E" panose="02020800000000000000" charset="-128"/>
                 <a:cs typeface="HGS明朝E" panose="02020800000000000000" charset="-128"/>
@@ -1366,7 +1366,7 @@
               <a:t>不動産保証協会会員</a:t>
             </a:r>
             <a:r>
-              <a:rPr lang="en-US" altLang="ja-JP" sz="700" b="1" dirty="0">
+              <a:rPr lang="en-US" altLang="ja-JP" sz="650" b="1" dirty="0">
                 <a:latin typeface="HGS明朝E" panose="02020800000000000000" charset="-128"/>
                 <a:ea typeface="HGS明朝E" panose="02020800000000000000" charset="-128"/>
                 <a:cs typeface="HGS明朝E" panose="02020800000000000000" charset="-128"/>
@@ -1374,7 +1374,7 @@
               <a:t>(</a:t>
             </a:r>
             <a:r>
-              <a:rPr lang="ja-JP" altLang="en-US" sz="700" b="1" dirty="0">
+              <a:rPr lang="ja-JP" altLang="en-US" sz="650" b="1" dirty="0">
                 <a:latin typeface="HGS明朝E" panose="02020800000000000000" charset="-128"/>
                 <a:ea typeface="HGS明朝E" panose="02020800000000000000" charset="-128"/>
                 <a:cs typeface="HGS明朝E" panose="02020800000000000000" charset="-128"/>
@@ -1382,7 +1382,7 @@
               <a:t>公社</a:t>
             </a:r>
             <a:r>
-              <a:rPr lang="en-US" altLang="ja-JP" sz="700" b="1" dirty="0">
+              <a:rPr lang="en-US" altLang="ja-JP" sz="650" b="1" dirty="0">
                 <a:latin typeface="HGS明朝E" panose="02020800000000000000" charset="-128"/>
                 <a:ea typeface="HGS明朝E" panose="02020800000000000000" charset="-128"/>
                 <a:cs typeface="HGS明朝E" panose="02020800000000000000" charset="-128"/>
@@ -1390,7 +1390,7 @@
               <a:t>)</a:t>
             </a:r>
             <a:r>
-              <a:rPr lang="ja-JP" altLang="en-US" sz="700" b="1" dirty="0">
+              <a:rPr lang="ja-JP" altLang="en-US" sz="650" b="1" dirty="0">
                 <a:latin typeface="HGS明朝E" panose="02020800000000000000" charset="-128"/>
                 <a:ea typeface="HGS明朝E" panose="02020800000000000000" charset="-128"/>
                 <a:cs typeface="HGS明朝E" panose="02020800000000000000" charset="-128"/>
@@ -3080,7 +3080,7 @@
                           <a:ea typeface="HGS明朝E"/>
                           <a:cs typeface="HGS明朝E"/>
                         </a:rPr>
-                        <a:t>土地面積</a:t>
+                        <a:t>敷地面積</a:t>
                       </a:r>
                     </a:p>
                   </a:txBody>
@@ -4767,7 +4767,7 @@
         <p:spPr>
           <a:xfrm>
             <a:off x="4032000" y="6832800"/>
-            <a:ext cx="2232000" cy="677108"/>
+            <a:ext cx="2268000" cy="677108"/>
           </a:xfrm>
           <a:prstGeom prst="rect">
             <a:avLst/>
@@ -4789,7 +4789,7 @@
               </a:spcAft>
             </a:pPr>
             <a:r>
-              <a:rPr sz="1100" b="1" dirty="0">
+              <a:rPr sz="850" b="1" dirty="0">
                 <a:latin typeface="HGS明朝E"/>
                 <a:ea typeface="HGS明朝E"/>
                 <a:cs typeface="HGS明朝E"/>
@@ -4797,7 +4797,7 @@
               <a:t>TEL</a:t>
             </a:r>
             <a:r>
-              <a:rPr lang="en-US" sz="1100" b="1" dirty="0">
+              <a:rPr lang="en-US" sz="850" b="1" dirty="0">
                 <a:latin typeface="HGS明朝E"/>
                 <a:ea typeface="HGS明朝E"/>
                 <a:cs typeface="HGS明朝E"/>
@@ -4805,7 +4805,7 @@
               <a:t>:</a:t>
             </a:r>
             <a:r>
-              <a:rPr sz="1100" b="1" dirty="0">
+              <a:rPr sz="850" b="1" dirty="0">
                 <a:latin typeface="HGS明朝E"/>
                 <a:ea typeface="HGS明朝E"/>
                 <a:cs typeface="HGS明朝E"/>
@@ -4820,7 +4820,7 @@
           </a:p>
           <a:p>
             <a:r>
-              <a:rPr lang="ja-JP" altLang="en-US" sz="1100" b="1" dirty="0">
+              <a:rPr lang="ja-JP" altLang="en-US" sz="850" b="1" dirty="0">
                 <a:latin typeface="HGS明朝E"/>
                 <a:ea typeface="HGS明朝E"/>
                 <a:cs typeface="HGS明朝E"/>
@@ -4828,7 +4828,7 @@
               <a:t>携帯</a:t>
             </a:r>
             <a:r>
-              <a:rPr lang="en-US" altLang="ja-JP" sz="1100" b="1" dirty="0">
+              <a:rPr lang="en-US" altLang="ja-JP" sz="850" b="1" dirty="0">
                 <a:latin typeface="HGS明朝E"/>
                 <a:ea typeface="HGS明朝E"/>
                 <a:cs typeface="HGS明朝E"/>
@@ -4836,7 +4836,7 @@
               <a:t>:{{AGENT_MOBILE}}</a:t>
             </a:r>
             <a:r>
-              <a:rPr lang="ja-JP" altLang="en-US" sz="800" b="1" dirty="0">
+              <a:rPr lang="ja-JP" altLang="en-US" sz="850" b="1" dirty="0">
                 <a:latin typeface="HGS明朝E"/>
                 <a:ea typeface="HGS明朝E"/>
                 <a:cs typeface="HGS明朝E"/>
@@ -4851,7 +4851,7 @@
           </a:p>
           <a:p>
             <a:r>
-              <a:rPr lang="fr-FR" altLang="ja-JP" sz="1100" b="1" dirty="0">
+              <a:rPr lang="fr-FR" altLang="ja-JP" sz="850" b="1" dirty="0">
                 <a:solidFill>
                   <a:srgbClr val="1E2328"/>
                 </a:solidFill>
@@ -4869,7 +4869,7 @@
           </a:p>
           <a:p>
             <a:r>
-              <a:rPr lang="ja-JP" altLang="en-US" sz="1100" b="1" dirty="0">
+              <a:rPr lang="ja-JP" altLang="en-US" sz="850" b="1" dirty="0">
                 <a:solidFill>
                   <a:srgbClr val="1E2328"/>
                 </a:solidFill>
@@ -4880,7 +4880,7 @@
               <a:t>定休</a:t>
             </a:r>
             <a:r>
-              <a:rPr lang="en-US" altLang="ja-JP" sz="1100" b="1" dirty="0">
+              <a:rPr lang="en-US" altLang="ja-JP" sz="850" b="1" dirty="0">
                 <a:solidFill>
                   <a:srgbClr val="1E2328"/>
                 </a:solidFill>
@@ -4891,7 +4891,7 @@
               <a:t>:</a:t>
             </a:r>
             <a:r>
-              <a:rPr lang="ja-JP" altLang="en-US" sz="1100" b="1" dirty="0">
+              <a:rPr lang="ja-JP" altLang="en-US" sz="850" b="1" dirty="0">
                 <a:solidFill>
                   <a:srgbClr val="1E2328"/>
                 </a:solidFill>
@@ -4902,7 +4902,7 @@
               <a:t>毎週火曜・水曜</a:t>
             </a:r>
             <a:r>
-              <a:rPr lang="en-US" altLang="ja-JP" sz="800" b="1" dirty="0">
+              <a:rPr lang="en-US" altLang="ja-JP" sz="850" b="1" dirty="0">
                 <a:solidFill>
                   <a:srgbClr val="1E2328"/>
                 </a:solidFill>
@@ -4913,7 +4913,7 @@
               <a:t>(</a:t>
             </a:r>
             <a:r>
-              <a:rPr lang="ja-JP" altLang="en-US" sz="800" b="1" dirty="0">
+              <a:rPr lang="ja-JP" altLang="en-US" sz="850" b="1" dirty="0">
                 <a:solidFill>
                   <a:srgbClr val="1E2328"/>
                 </a:solidFill>
@@ -4924,7 +4924,7 @@
               <a:t>急用時は担当まで</a:t>
             </a:r>
             <a:r>
-              <a:rPr lang="en-US" altLang="ja-JP" sz="800" b="1" dirty="0">
+              <a:rPr lang="en-US" altLang="ja-JP" sz="850" b="1" dirty="0">
                 <a:solidFill>
                   <a:srgbClr val="1E2328"/>
                 </a:solidFill>
@@ -4953,8 +4953,8 @@
         </p:nvSpPr>
         <p:spPr>
           <a:xfrm>
-            <a:off x="6141032" y="6893555"/>
-            <a:ext cx="2477935" cy="551689"/>
+            <a:off x="6318000" y="6893555"/>
+            <a:ext cx="2160000" cy="551689"/>
           </a:xfrm>
           <a:prstGeom prst="rect">
             <a:avLst/>
@@ -4979,7 +4979,7 @@
               </a:spcAft>
             </a:pPr>
             <a:r>
-              <a:rPr lang="ja-JP" altLang="en-US" sz="1050" b="1" dirty="0">
+              <a:rPr lang="ja-JP" altLang="en-US" sz="1000" b="1" dirty="0">
                 <a:latin typeface="HGS明朝E"/>
                 <a:ea typeface="HGS明朝E"/>
                 <a:cs typeface="HGS明朝E"/>
@@ -5005,7 +5005,7 @@
               </a:spcAft>
             </a:pPr>
             <a:r>
-              <a:rPr sz="1050" b="1" dirty="0">
+              <a:rPr sz="1000" b="1" dirty="0">
                 <a:latin typeface="HGS明朝E"/>
                 <a:ea typeface="HGS明朝E"/>
                 <a:cs typeface="HGS明朝E"/>
@@ -5013,7 +5013,7 @@
               <a:t>内覧依頼</a:t>
             </a:r>
             <a:r>
-              <a:rPr lang="en-US" sz="1050" b="1" dirty="0">
+              <a:rPr lang="en-US" sz="1000" b="1" dirty="0">
                 <a:latin typeface="HGS明朝E"/>
                 <a:ea typeface="HGS明朝E"/>
                 <a:cs typeface="HGS明朝E"/>
@@ -5021,7 +5021,7 @@
               <a:t>/</a:t>
             </a:r>
             <a:r>
-              <a:rPr sz="1050" b="1" dirty="0">
+              <a:rPr sz="1000" b="1" dirty="0">
                 <a:latin typeface="HGS明朝E"/>
                 <a:ea typeface="HGS明朝E"/>
                 <a:cs typeface="HGS明朝E"/>
@@ -5029,7 +5029,7 @@
               <a:t>資料請求</a:t>
             </a:r>
             <a:r>
-              <a:rPr lang="en-US" sz="1050" b="1" dirty="0">
+              <a:rPr lang="en-US" sz="1000" b="1" dirty="0">
                 <a:latin typeface="HGS明朝E"/>
                 <a:ea typeface="HGS明朝E"/>
                 <a:cs typeface="HGS明朝E"/>
@@ -5037,7 +5037,7 @@
               <a:t>/</a:t>
             </a:r>
             <a:r>
-              <a:rPr sz="1050" b="1" dirty="0" err="1">
+              <a:rPr sz="1000" b="1" dirty="0" err="1">
                 <a:latin typeface="HGS明朝E"/>
                 <a:ea typeface="HGS明朝E"/>
                 <a:cs typeface="HGS明朝E"/>
@@ -5063,7 +5063,7 @@
               </a:spcAft>
             </a:pPr>
             <a:r>
-              <a:rPr sz="1050" b="1" dirty="0">
+              <a:rPr sz="1000" b="1" dirty="0">
                 <a:latin typeface="HGS明朝E"/>
                 <a:ea typeface="HGS明朝E"/>
                 <a:cs typeface="HGS明朝E"/>
@@ -5071,7 +5071,7 @@
               <a:t>QRコードから</a:t>
             </a:r>
             <a:r>
-              <a:rPr lang="ja-JP" altLang="en-US" sz="1050" b="1" dirty="0">
+              <a:rPr lang="ja-JP" altLang="en-US" sz="1000" b="1" dirty="0">
                 <a:latin typeface="HGS明朝E"/>
                 <a:ea typeface="HGS明朝E"/>
                 <a:cs typeface="HGS明朝E"/>
